--- a/docs/ea-renewal-proposal/동아그룹_Microsoft_라이선스_갱신제안서_2026.pptx
+++ b/docs/ea-renewal-proposal/동아그룹_Microsoft_라이선스_갱신제안서_2026.pptx
@@ -14122,7 +14122,7 @@
                 <a:latin typeface="맑은 고딕"/>
                 <a:ea typeface="맑은 고딕"/>
               </a:rPr>
-              <a:t>105 → 15 Copy · 실사용 기준 재산정</a:t>
+              <a:t>3사 82→15 Copy 재산정 + 쏘시오 갱신 종료</a:t>
             </a:r>
           </a:p>
         </p:txBody>
@@ -28315,7 +28315,7 @@
                 <a:latin typeface="맑은 고딕"/>
                 <a:ea typeface="맑은 고딕"/>
               </a:rPr>
-              <a:t>활용도 검증 후 필요 수량만 유지 (105 → 15 Copy)</a:t>
+              <a:t>3사 82→15 Copy 재산정, 쏘시오는 갱신 종료</a:t>
             </a:r>
           </a:p>
         </p:txBody>

--- a/docs/ea-renewal-proposal/동아그룹_Microsoft_라이선스_갱신제안서_2026.pptx
+++ b/docs/ea-renewal-proposal/동아그룹_Microsoft_라이선스_갱신제안서_2026.pptx
@@ -9580,7 +9580,7 @@
                 <a:latin typeface="맑은 고딕"/>
                 <a:ea typeface="맑은 고딕"/>
               </a:rPr>
-              <a:t>에스티젠바이오 +33.7% — 사업 확장(+130EA)이 만든 성장의 지표입니다</a:t>
+              <a:t>에스티젠바이오 +33.7% — 증가분은 전액 True-up 130EA(사용자 순증)에서 발생했습니다</a:t>
             </a:r>
           </a:p>
         </p:txBody>
@@ -21360,7 +21360,7 @@
                 <a:latin typeface="맑은 고딕"/>
                 <a:ea typeface="맑은 고딕"/>
               </a:rPr>
-              <a:t>4사 합계 +3.9% — 성장 투자(에스티젠·에스티)와 비용 절감(쏘시오·제약)이 균형을 이룹니다</a:t>
+              <a:t>4사 합계 +3.9% — 사용자 증가(에스티젠·에스티)와 비용 절감(쏘시오·제약)이 균형을 이룹니다</a:t>
             </a:r>
           </a:p>
         </p:txBody>
@@ -28416,7 +28416,7 @@
                 <a:latin typeface="맑은 고딕"/>
                 <a:ea typeface="맑은 고딕"/>
               </a:rPr>
-              <a:t>성장 재원</a:t>
+              <a:t>56% 상쇄</a:t>
             </a:r>
           </a:p>
           <a:p>
@@ -28433,7 +28433,7 @@
                 <a:latin typeface="맑은 고딕"/>
                 <a:ea typeface="맑은 고딕"/>
               </a:rPr>
-              <a:t>True-up 증가분의 56%를 자체 상쇄</a:t>
+              <a:t>True-up 증가분 대비 기타 라이선스 절감액 비중</a:t>
             </a:r>
           </a:p>
         </p:txBody>

--- a/docs/ea-renewal-proposal/동아그룹_Microsoft_라이선스_갱신제안서_2026.pptx
+++ b/docs/ea-renewal-proposal/동아그룹_Microsoft_라이선스_갱신제안서_2026.pptx
@@ -3376,7 +3376,7 @@
                 <a:latin typeface="맑은 고딕"/>
                 <a:ea typeface="맑은 고딕"/>
               </a:rPr>
-              <a:t>2026. 03. 31 ~ 2028. 04. 01  (3년 차 갱신)</a:t>
+              <a:t>2024. 03. 31 ~ 2027. 04. 01  (3년 차 갱신)</a:t>
             </a:r>
           </a:p>
           <a:p>
@@ -3744,7 +3744,7 @@
                 <a:latin typeface="맑은 고딕"/>
                 <a:ea typeface="맑은 고딕"/>
               </a:rPr>
-              <a:t>동아그룹 Microsoft 라이선스 갱신 제안서  |  2026.03.31 ~ 2028.04.01</a:t>
+              <a:t>동아그룹 Microsoft 라이선스 갱신 제안서  |  2024.03.31 ~ 2027.04.01</a:t>
             </a:r>
           </a:p>
         </p:txBody>
@@ -6797,7 +6797,7 @@
                 <a:latin typeface="맑은 고딕"/>
                 <a:ea typeface="맑은 고딕"/>
               </a:rPr>
-              <a:t>동아그룹 Microsoft 라이선스 갱신 제안서  |  2026.03.31 ~ 2028.04.01</a:t>
+              <a:t>동아그룹 Microsoft 라이선스 갱신 제안서  |  2024.03.31 ~ 2027.04.01</a:t>
             </a:r>
           </a:p>
         </p:txBody>
@@ -9708,7 +9708,7 @@
                 <a:latin typeface="맑은 고딕"/>
                 <a:ea typeface="맑은 고딕"/>
               </a:rPr>
-              <a:t>동아그룹 Microsoft 라이선스 갱신 제안서  |  2026.03.31 ~ 2028.04.01</a:t>
+              <a:t>동아그룹 Microsoft 라이선스 갱신 제안서  |  2024.03.31 ~ 2027.04.01</a:t>
             </a:r>
           </a:p>
         </p:txBody>
@@ -12619,7 +12619,7 @@
                 <a:latin typeface="맑은 고딕"/>
                 <a:ea typeface="맑은 고딕"/>
               </a:rPr>
-              <a:t>동아그룹 Microsoft 라이선스 갱신 제안서  |  2026.03.31 ~ 2028.04.01</a:t>
+              <a:t>동아그룹 Microsoft 라이선스 갱신 제안서  |  2024.03.31 ~ 2027.04.01</a:t>
             </a:r>
           </a:p>
         </p:txBody>
@@ -14628,7 +14628,7 @@
                 <a:latin typeface="맑은 고딕"/>
                 <a:ea typeface="맑은 고딕"/>
               </a:rPr>
-              <a:t>동아그룹 Microsoft 라이선스 갱신 제안서  |  2026.03.31 ~ 2028.04.01</a:t>
+              <a:t>동아그룹 Microsoft 라이선스 갱신 제안서  |  2024.03.31 ~ 2027.04.01</a:t>
             </a:r>
           </a:p>
         </p:txBody>
@@ -14824,7 +14824,7 @@
                           <a:latin typeface="맑은 고딕"/>
                           <a:ea typeface="맑은 고딕"/>
                         </a:rPr>
-                        <a:t>2026. 03. 31 ~ 2028. 04. 01  (3년 차 갱신)</a:t>
+                        <a:t>2024. 03. 31 ~ 2027. 04. 01  (3년 차 갱신)</a:t>
                       </a:r>
                     </a:p>
                   </a:txBody>
@@ -15710,7 +15710,7 @@
                 <a:latin typeface="맑은 고딕"/>
                 <a:ea typeface="맑은 고딕"/>
               </a:rPr>
-              <a:t>계약 체결 (2026. 03. 31 발효)</a:t>
+              <a:t>3년 차(26Y) 갱신 물량 확정</a:t>
             </a:r>
           </a:p>
         </p:txBody>
@@ -15834,7 +15834,7 @@
                 <a:latin typeface="맑은 고딕"/>
                 <a:ea typeface="맑은 고딕"/>
               </a:rPr>
-              <a:t>갱신 적용 및 연중 True-up 관리 지원</a:t>
+              <a:t>확정분 반영 및 연중 True-up 관리 지원</a:t>
             </a:r>
           </a:p>
         </p:txBody>
@@ -16528,7 +16528,7 @@
                 <a:latin typeface="맑은 고딕"/>
                 <a:ea typeface="맑은 고딕"/>
               </a:rPr>
-              <a:t>동아그룹 Microsoft 라이선스 갱신 제안서  |  2026.03.31 ~ 2028.04.01</a:t>
+              <a:t>동아그룹 Microsoft 라이선스 갱신 제안서  |  2024.03.31 ~ 2027.04.01</a:t>
             </a:r>
           </a:p>
         </p:txBody>
@@ -18282,7 +18282,7 @@
                 <a:latin typeface="맑은 고딕"/>
                 <a:ea typeface="맑은 고딕"/>
               </a:rPr>
-              <a:t>동아그룹 Microsoft 라이선스 갱신 제안서  |  2026.03.31 ~ 2028.04.01</a:t>
+              <a:t>동아그룹 Microsoft 라이선스 갱신 제안서  |  2024.03.31 ~ 2027.04.01</a:t>
             </a:r>
           </a:p>
         </p:txBody>
@@ -20197,7 +20197,7 @@
                 <a:latin typeface="맑은 고딕"/>
                 <a:ea typeface="맑은 고딕"/>
               </a:rPr>
-              <a:t>동아그룹 Microsoft 라이선스 갱신 제안서  |  2026.03.31 ~ 2028.04.01</a:t>
+              <a:t>동아그룹 Microsoft 라이선스 갱신 제안서  |  2024.03.31 ~ 2027.04.01</a:t>
             </a:r>
           </a:p>
         </p:txBody>
@@ -21488,7 +21488,7 @@
                 <a:latin typeface="맑은 고딕"/>
                 <a:ea typeface="맑은 고딕"/>
               </a:rPr>
-              <a:t>동아그룹 Microsoft 라이선스 갱신 제안서  |  2026.03.31 ~ 2028.04.01</a:t>
+              <a:t>동아그룹 Microsoft 라이선스 갱신 제안서  |  2024.03.31 ~ 2027.04.01</a:t>
             </a:r>
           </a:p>
         </p:txBody>
@@ -22930,7 +22930,7 @@
                 <a:latin typeface="맑은 고딕"/>
                 <a:ea typeface="맑은 고딕"/>
               </a:rPr>
-              <a:t>동아그룹 Microsoft 라이선스 갱신 제안서  |  2026.03.31 ~ 2028.04.01</a:t>
+              <a:t>동아그룹 Microsoft 라이선스 갱신 제안서  |  2024.03.31 ~ 2027.04.01</a:t>
             </a:r>
           </a:p>
         </p:txBody>
@@ -24760,7 +24760,7 @@
                 <a:latin typeface="맑은 고딕"/>
                 <a:ea typeface="맑은 고딕"/>
               </a:rPr>
-              <a:t>동아그룹 Microsoft 라이선스 갱신 제안서  |  2026.03.31 ~ 2028.04.01</a:t>
+              <a:t>동아그룹 Microsoft 라이선스 갱신 제안서  |  2024.03.31 ~ 2027.04.01</a:t>
             </a:r>
           </a:p>
         </p:txBody>
@@ -26493,7 +26493,7 @@
                 <a:latin typeface="맑은 고딕"/>
                 <a:ea typeface="맑은 고딕"/>
               </a:rPr>
-              <a:t>동아그룹 Microsoft 라이선스 갱신 제안서  |  2026.03.31 ~ 2028.04.01</a:t>
+              <a:t>동아그룹 Microsoft 라이선스 갱신 제안서  |  2024.03.31 ~ 2027.04.01</a:t>
             </a:r>
           </a:p>
         </p:txBody>
@@ -28703,7 +28703,7 @@
                 <a:latin typeface="맑은 고딕"/>
                 <a:ea typeface="맑은 고딕"/>
               </a:rPr>
-              <a:t>동아그룹 Microsoft 라이선스 갱신 제안서  |  2026.03.31 ~ 2028.04.01</a:t>
+              <a:t>동아그룹 Microsoft 라이선스 갱신 제안서  |  2024.03.31 ~ 2027.04.01</a:t>
             </a:r>
           </a:p>
         </p:txBody>

--- a/docs/ea-renewal-proposal/동아그룹_Microsoft_라이선스_갱신제안서_2026.pptx
+++ b/docs/ea-renewal-proposal/동아그룹_Microsoft_라이선스_갱신제안서_2026.pptx
@@ -3616,7 +3616,7 @@
                 <a:latin typeface="맑은 고딕"/>
                 <a:ea typeface="맑은 고딕"/>
               </a:rPr>
-              <a:t>동아에스티 +4.3% — True-up 92EA 증가를 Copilot 실사용 조정으로 상쇄했습니다</a:t>
+              <a:t>동아에스티 +4.3% — True-up 92EA 증가분이 Copilot 실사용 조정으로 상당 부분 상쇄됩니다</a:t>
             </a:r>
           </a:p>
         </p:txBody>
@@ -4105,7 +4105,7 @@
                 <a:latin typeface="맑은 고딕"/>
                 <a:ea typeface="맑은 고딕"/>
               </a:rPr>
-              <a:t>EA 증가액 44,990,400원(True-up 92EA)을 Copilot 조정 -17,047,800원(42→9 Copy)으로 상쇄해 총 증가율을 +4.3%로 낮췄습니다. ※ 전체계는 단수 조정(-4,860원) 반영 금액</a:t>
+              <a:t>EA 증가액 44,990,400원(True-up 92EA)이 Copilot 조정 절감액 -17,047,800원(42→9 Copy)으로 상당 부분 상쇄되어 총 증가율은 +4.3%입니다. ※ 전체계는 단수 조정(-4,860원) 반영 금액</a:t>
             </a:r>
           </a:p>
         </p:txBody>
@@ -18154,7 +18154,7 @@
                 <a:latin typeface="맑은 고딕"/>
                 <a:ea typeface="맑은 고딕"/>
               </a:rPr>
-              <a:t>26Y 총 계약 1,317백만 원(+3.9%) — 성장 비용을 라이선스 최적화로 상쇄했습니다</a:t>
+              <a:t>26Y 총 계약 1,317백만 원(+3.9%) — EA 증가분이 기타 라이선스 절감으로 상쇄됩니다</a:t>
             </a:r>
           </a:p>
         </p:txBody>
@@ -19971,7 +19971,7 @@
                 <a:latin typeface="맑은 고딕"/>
                 <a:ea typeface="맑은 고딕"/>
               </a:rPr>
-              <a:t>Copilot 실사용 조정·Easy Tree 종료로 62,760,600원 절감 → 총 증가율을 +3.9%로 방어</a:t>
+              <a:t>Copilot 실사용 조정·Easy Tree 종료로 62,760,600원이 절감되어 총 증가율은 +3.9%입니다</a:t>
             </a:r>
           </a:p>
         </p:txBody>
@@ -20069,7 +20069,7 @@
                 <a:latin typeface="맑은 고딕"/>
                 <a:ea typeface="맑은 고딕"/>
               </a:rPr>
-              <a:t>동결·정산·최적화 — 세 갈래 원칙으로 총소유비용을 관리합니다</a:t>
+              <a:t>동결·정산·최적화 — 세 갈래 원칙으로 구성됩니다</a:t>
             </a:r>
           </a:p>
         </p:txBody>
@@ -21360,7 +21360,7 @@
                 <a:latin typeface="맑은 고딕"/>
                 <a:ea typeface="맑은 고딕"/>
               </a:rPr>
-              <a:t>4사 합계 +3.9% — 사용자 증가(에스티젠·에스티)와 비용 절감(쏘시오·제약)이 균형을 이룹니다</a:t>
+              <a:t>4사 합계는 +3.9%이며, 회사별 증감률은 -39.8%~+33.7%로 상이합니다</a:t>
             </a:r>
           </a:p>
         </p:txBody>
@@ -26125,7 +26125,7 @@
               </a:spcAft>
             </a:pPr>
             <a:r>
-              <a:rPr sz="2000" b="1" i="0">
+              <a:rPr sz="1800" b="1" i="0">
                 <a:solidFill>
                   <a:srgbClr val="1B2A4A"/>
                 </a:solidFill>
@@ -26189,7 +26189,7 @@
                 <a:latin typeface="맑은 고딕"/>
                 <a:ea typeface="맑은 고딕"/>
               </a:rPr>
-              <a:t>비용 안정성</a:t>
+              <a:t>증감 없음 사유</a:t>
             </a:r>
           </a:p>
           <a:p>
@@ -26199,14 +26199,14 @@
               </a:spcAft>
             </a:pPr>
             <a:r>
-              <a:rPr sz="2000" b="1" i="0">
+              <a:rPr sz="1800" b="1" i="0">
                 <a:solidFill>
-                  <a:srgbClr val="E86C1A"/>
+                  <a:srgbClr val="1B2A4A"/>
                 </a:solidFill>
                 <a:latin typeface="맑은 고딕"/>
                 <a:ea typeface="맑은 고딕"/>
               </a:rPr>
-              <a:t>3년 약정 동결</a:t>
+              <a:t>서버 수량 변동 없음</a:t>
             </a:r>
           </a:p>
           <a:p>
@@ -26223,7 +26223,7 @@
                 <a:latin typeface="맑은 고딕"/>
                 <a:ea typeface="맑은 고딕"/>
               </a:rPr>
-              <a:t>서버 인프라 예산의 예측 가능성 확보</a:t>
+              <a:t>4사 서버·인프라 규모가 늘지 않아 단가·수량 모두 동일</a:t>
             </a:r>
           </a:p>
         </p:txBody>
@@ -28575,7 +28575,7 @@
                 <a:latin typeface="맑은 고딕"/>
                 <a:ea typeface="맑은 고딕"/>
               </a:rPr>
-              <a:t>동아쏘시오홀딩스 -39.8% — Copilot·Easy Tree 종료로 연 28백만 원을 절감합니다</a:t>
+              <a:t>동아쏘시오홀딩스 -39.8% — Copilot·Easy Tree 종료로 연 28,148,400원이 감소합니다</a:t>
             </a:r>
           </a:p>
         </p:txBody>
